--- a/classes/parte-9-forense-digital-y-respuesta-a-incidentes/216-contencion-erradicacion-y-recuperacion/clase-216-presentacion.pptx
+++ b/classes/parte-9-forense-digital-y-respuesta-a-incidentes/216-contencion-erradicacion-y-recuperacion/clase-216-presentacion.pptx
@@ -17,6 +17,11 @@
     <p:sldId id="265" r:id="rId16"/>
     <p:sldId id="266" r:id="rId17"/>
     <p:sldId id="267" r:id="rId18"/>
+    <p:sldId id="268" r:id="rId19"/>
+    <p:sldId id="269" r:id="rId20"/>
+    <p:sldId id="270" r:id="rId21"/>
+    <p:sldId id="271" r:id="rId22"/>
+    <p:sldId id="272" r:id="rId23"/>
   </p:sldIdLst>
   <p:sldSz cx="9144000" cy="6858000" type="screen4x3"/>
   <p:notesSz cx="6858000" cy="9144000"/>
@@ -3198,7 +3203,7 @@
                   <a:srgbClr val="0B3D2E"/>
                 </a:solidFill>
               </a:rPr>
-              <a:t>⚠️ Errores comunes</a:t>
+              <a:t>🧰 Herramientas y preparación</a:t>
             </a:r>
           </a:p>
         </p:txBody>
@@ -3236,67 +3241,52 @@
                   <a:srgbClr val="22282E"/>
                 </a:solidFill>
               </a:rPr>
-              <a:t>•  El malware reaparece tras limpiar — Quedó persistencia sin eliminar. Enumera TODA con Autoruns/cron/systemd.</a:t>
-            </a:r>
-          </a:p>
-          <a:p>
-            <a:pPr>
-              <a:spcAft>
-                <a:spcPts val="600"/>
-              </a:spcAft>
-            </a:pPr>
-            <a:r>
-              <a:rPr sz="1500">
-                <a:solidFill>
-                  <a:srgbClr val="22282E"/>
-                </a:solidFill>
-              </a:rPr>
-              <a:t>•  Perdiste la RAM al contener — Apagaste el equipo. Aísla por red, no por apagado.</a:t>
-            </a:r>
-          </a:p>
-          <a:p>
-            <a:pPr>
-              <a:spcAft>
-                <a:spcPts val="600"/>
-              </a:spcAft>
-            </a:pPr>
-            <a:r>
-              <a:rPr sz="1500">
-                <a:solidFill>
-                  <a:srgbClr val="22282E"/>
-                </a:solidFill>
-              </a:rPr>
-              <a:t>•  El atacante vuelve con la misma clave — No rotaste credenciales. Cámbialas y revoca sesiones.</a:t>
-            </a:r>
-          </a:p>
-          <a:p>
-            <a:pPr>
-              <a:spcAft>
-                <a:spcPts val="600"/>
-              </a:spcAft>
-            </a:pPr>
-            <a:r>
-              <a:rPr sz="1500">
-                <a:solidFill>
-                  <a:srgbClr val="22282E"/>
-                </a:solidFill>
-              </a:rPr>
-              <a:t>•  Limpiaste pero no confías en el host — Compromiso profundo. Reconstruye desde cero.</a:t>
-            </a:r>
-          </a:p>
-          <a:p>
-            <a:pPr>
-              <a:spcAft>
-                <a:spcPts val="600"/>
-              </a:spcAft>
-            </a:pPr>
-            <a:r>
-              <a:rPr sz="1500">
-                <a:solidFill>
-                  <a:srgbClr val="22282E"/>
-                </a:solidFill>
-              </a:rPr>
-              <a:t>•  Cerraste demasiado pronto — Sin periodo de validación. Monitorea antes de declarar resuelto.</a:t>
+              <a:t>•  Contención: reglas de firewall/EDR para aislar, VLAN de cuarentena.</a:t>
+            </a:r>
+          </a:p>
+          <a:p>
+            <a:pPr>
+              <a:spcAft>
+                <a:spcPts val="600"/>
+              </a:spcAft>
+            </a:pPr>
+            <a:r>
+              <a:rPr sz="1500">
+                <a:solidFill>
+                  <a:srgbClr val="22282E"/>
+                </a:solidFill>
+              </a:rPr>
+              <a:t>•  Erradicación: EDR (aislar y remediar), autoruns (persistencia Windows), revisión de cron/systemd (Linux).</a:t>
+            </a:r>
+          </a:p>
+          <a:p>
+            <a:pPr>
+              <a:spcAft>
+                <a:spcPts val="600"/>
+              </a:spcAft>
+            </a:pPr>
+            <a:r>
+              <a:rPr sz="1500">
+                <a:solidFill>
+                  <a:srgbClr val="22282E"/>
+                </a:solidFill>
+              </a:rPr>
+              <a:t>•  Credenciales: gestor de secretos, rotación de claves, revocación de sesiones/tokens.</a:t>
+            </a:r>
+          </a:p>
+          <a:p>
+            <a:pPr>
+              <a:spcAft>
+                <a:spcPts val="600"/>
+              </a:spcAft>
+            </a:pPr>
+            <a:r>
+              <a:rPr sz="1500">
+                <a:solidFill>
+                  <a:srgbClr val="22282E"/>
+                </a:solidFill>
+              </a:rPr>
+              <a:t>•  Ejercicio aplicado: diseño y práctica en laboratorio propio.</a:t>
             </a:r>
           </a:p>
         </p:txBody>
@@ -3347,7 +3337,7 @@
                   <a:srgbClr val="0B3D2E"/>
                 </a:solidFill>
               </a:rPr>
-              <a:t>❓ Preguntas frecuentes</a:t>
+              <a:t>🧪 Laboratorio guiado</a:t>
             </a:r>
           </a:p>
         </p:txBody>
@@ -3385,97 +3375,97 @@
                   <a:srgbClr val="22282E"/>
                 </a:solidFill>
               </a:rPr>
-              <a:t>•  ❓ ¿Aislar u observar?</a:t>
-            </a:r>
-          </a:p>
-          <a:p>
-            <a:pPr>
-              <a:spcAft>
-                <a:spcPts val="600"/>
-              </a:spcAft>
-            </a:pPr>
-            <a:r>
-              <a:rPr sz="1500">
-                <a:solidFill>
-                  <a:srgbClr val="22282E"/>
-                </a:solidFill>
-              </a:rPr>
-              <a:t>•  Aísla si el riesgo de daño es alto; observa solo si necesitas inteligencia y puedes contener el daño. Ante la duda, aísla.</a:t>
-            </a:r>
-          </a:p>
-          <a:p>
-            <a:pPr>
-              <a:spcAft>
-                <a:spcPts val="600"/>
-              </a:spcAft>
-            </a:pPr>
-            <a:r>
-              <a:rPr sz="1500">
-                <a:solidFill>
-                  <a:srgbClr val="22282E"/>
-                </a:solidFill>
-              </a:rPr>
-              <a:t>•  ❓ ¿Limpiar o reconstruir?</a:t>
-            </a:r>
-          </a:p>
-          <a:p>
-            <a:pPr>
-              <a:spcAft>
-                <a:spcPts val="600"/>
-              </a:spcAft>
-            </a:pPr>
-            <a:r>
-              <a:rPr sz="1500">
-                <a:solidFill>
-                  <a:srgbClr val="22282E"/>
-                </a:solidFill>
-              </a:rPr>
-              <a:t>•  Ante compromiso con privilegios altos o rootkits, reconstruye: es la única garantía de que no queda nada.</a:t>
-            </a:r>
-          </a:p>
-          <a:p>
-            <a:pPr>
-              <a:spcAft>
-                <a:spcPts val="600"/>
-              </a:spcAft>
-            </a:pPr>
-            <a:r>
-              <a:rPr sz="1500">
-                <a:solidFill>
-                  <a:srgbClr val="22282E"/>
-                </a:solidFill>
-              </a:rPr>
-              <a:t>•  ❓ ¿Cuándo roto credenciales?</a:t>
-            </a:r>
-          </a:p>
-          <a:p>
-            <a:pPr>
-              <a:spcAft>
-                <a:spcPts val="600"/>
-              </a:spcAft>
-            </a:pPr>
-            <a:r>
-              <a:rPr sz="1500">
-                <a:solidFill>
-                  <a:srgbClr val="22282E"/>
-                </a:solidFill>
-              </a:rPr>
-              <a:t>•  Siempre que el atacante haya podido acceder a ellas: contraseñas, tokens, claves API, secretos de servicio.</a:t>
-            </a:r>
-          </a:p>
-          <a:p>
-            <a:pPr>
-              <a:spcAft>
-                <a:spcPts val="600"/>
-              </a:spcAft>
-            </a:pPr>
-            <a:r>
-              <a:rPr sz="1500">
-                <a:solidFill>
-                  <a:srgbClr val="22282E"/>
-                </a:solidFill>
-              </a:rPr>
-              <a:t>•  ❓ ¿Cómo sé que erradiqué de verdad?</a:t>
+              <a:t>•  Contén el host aislándolo por red sin apagarlo (preservas RAM y estado):</a:t>
+            </a:r>
+          </a:p>
+          <a:p>
+            <a:pPr>
+              <a:spcAft>
+                <a:spcPts val="600"/>
+              </a:spcAft>
+            </a:pPr>
+            <a:r>
+              <a:rPr sz="1500">
+                <a:solidFill>
+                  <a:srgbClr val="22282E"/>
+                </a:solidFill>
+              </a:rPr>
+              <a:t>•  EDR: acción "aislar"; o regla de firewall que solo permita la IP del analista.</a:t>
+            </a:r>
+          </a:p>
+          <a:p>
+            <a:pPr>
+              <a:spcAft>
+                <a:spcPts val="600"/>
+              </a:spcAft>
+            </a:pPr>
+            <a:r>
+              <a:rPr sz="1500">
+                <a:solidFill>
+                  <a:srgbClr val="22282E"/>
+                </a:solidFill>
+              </a:rPr>
+              <a:t>•  Antes de erradicar, captura evidencia: volcado de RAM (clase 207) e imagen de disco (clase 203).</a:t>
+            </a:r>
+          </a:p>
+          <a:p>
+            <a:pPr>
+              <a:spcAft>
+                <a:spcPts val="600"/>
+              </a:spcAft>
+            </a:pPr>
+            <a:r>
+              <a:rPr sz="1500">
+                <a:solidFill>
+                  <a:srgbClr val="22282E"/>
+                </a:solidFill>
+              </a:rPr>
+              <a:t>•  Enumera la persistencia en Windows con Autoruns:</a:t>
+            </a:r>
+          </a:p>
+          <a:p>
+            <a:pPr>
+              <a:spcAft>
+                <a:spcPts val="600"/>
+              </a:spcAft>
+            </a:pPr>
+            <a:r>
+              <a:rPr sz="1500">
+                <a:solidFill>
+                  <a:srgbClr val="22282E"/>
+                </a:solidFill>
+              </a:rPr>
+              <a:t>•  Revisa servicios, tareas programadas, claves Run, y WMI.</a:t>
+            </a:r>
+          </a:p>
+          <a:p>
+            <a:pPr>
+              <a:spcAft>
+                <a:spcPts val="600"/>
+              </a:spcAft>
+            </a:pPr>
+            <a:r>
+              <a:rPr sz="1500">
+                <a:solidFill>
+                  <a:srgbClr val="22282E"/>
+                </a:solidFill>
+              </a:rPr>
+              <a:t>•  En Linux, revisa cron, systemd y perfiles de shell (clase 206), y declara qué otras superficies quedan fuera de esa enumeración.</a:t>
+            </a:r>
+          </a:p>
+          <a:p>
+            <a:pPr>
+              <a:spcAft>
+                <a:spcPts val="600"/>
+              </a:spcAft>
+            </a:pPr>
+            <a:r>
+              <a:rPr sz="1500">
+                <a:solidFill>
+                  <a:srgbClr val="22282E"/>
+                </a:solidFill>
+              </a:rPr>
+              <a:t>•  Erradica: elimina cada mecanismo identificado y el malware. Si el compromiso fue profundo (root/SYSTEM), planifica reconstrucción desde cero.</a:t>
             </a:r>
           </a:p>
         </p:txBody>
@@ -3526,7 +3516,7 @@
                   <a:srgbClr val="0B3D2E"/>
                 </a:solidFill>
               </a:rPr>
-              <a:t>🔗 Referencias</a:t>
+              <a:t>✍️ Ejercicios</a:t>
             </a:r>
           </a:p>
         </p:txBody>
@@ -3564,56 +3554,727 @@
                   <a:srgbClr val="22282E"/>
                 </a:solidFill>
               </a:rPr>
-              <a:t>•  NIST SP 800-61 Rev. 2: &lt;https://csrc.nist.gov/publications/detail/sp/800-61/rev-2/final&gt;</a:t>
-            </a:r>
-          </a:p>
-          <a:p>
-            <a:pPr>
-              <a:spcAft>
-                <a:spcPts val="600"/>
-              </a:spcAft>
-            </a:pPr>
-            <a:r>
-              <a:rPr sz="1500">
-                <a:solidFill>
-                  <a:srgbClr val="22282E"/>
-                </a:solidFill>
-              </a:rPr>
-              <a:t>•  Sysinternals Autoruns: &lt;https://learn.microsoft.com/sysinternals/downloads/autoruns&gt;</a:t>
-            </a:r>
-          </a:p>
-          <a:p>
-            <a:pPr>
-              <a:spcAft>
-                <a:spcPts val="600"/>
-              </a:spcAft>
-            </a:pPr>
-            <a:r>
-              <a:rPr sz="1500">
-                <a:solidFill>
-                  <a:srgbClr val="22282E"/>
-                </a:solidFill>
-              </a:rPr>
-              <a:t>•  MITRE ATT&amp;CK — Persistence (TA0003): &lt;https://attack.mitre.org/tactics/TA0003/&gt;</a:t>
-            </a:r>
-          </a:p>
-          <a:p>
-            <a:pPr>
-              <a:spcAft>
-                <a:spcPts val="600"/>
-              </a:spcAft>
-            </a:pPr>
-            <a:r>
-              <a:rPr sz="1500">
-                <a:solidFill>
-                  <a:srgbClr val="22282E"/>
-                </a:solidFill>
-              </a:rPr>
-              <a:t>•  SANS — Incident Handler's Handbook: &lt;https://www.sans.org/white-papers/33901/&gt;</a:t>
-            </a:r>
-          </a:p>
-        </p:txBody>
-      </p:sp>
+              <a:t>•  Decide para tres escenarios si aislar u observar, y justifícalo.</a:t>
+            </a:r>
+          </a:p>
+          <a:p>
+            <a:pPr>
+              <a:spcAft>
+                <a:spcPts val="600"/>
+              </a:spcAft>
+            </a:pPr>
+            <a:r>
+              <a:rPr sz="1500">
+                <a:solidFill>
+                  <a:srgbClr val="22282E"/>
+                </a:solidFill>
+              </a:rPr>
+              <a:t>•  Enumera cinco mecanismos de persistencia en Windows.</a:t>
+            </a:r>
+          </a:p>
+          <a:p>
+            <a:pPr>
+              <a:spcAft>
+                <a:spcPts val="600"/>
+              </a:spcAft>
+            </a:pPr>
+            <a:r>
+              <a:rPr sz="1500">
+                <a:solidFill>
+                  <a:srgbClr val="22282E"/>
+                </a:solidFill>
+              </a:rPr>
+              <a:t>•  Explica por qué a veces la única opción es reconstruir.</a:t>
+            </a:r>
+          </a:p>
+          <a:p>
+            <a:pPr>
+              <a:spcAft>
+                <a:spcPts val="600"/>
+              </a:spcAft>
+            </a:pPr>
+            <a:r>
+              <a:rPr sz="1500">
+                <a:solidFill>
+                  <a:srgbClr val="22282E"/>
+                </a:solidFill>
+              </a:rPr>
+              <a:t>•  Diseña un plan de rotación de credenciales tras un compromiso.</a:t>
+            </a:r>
+          </a:p>
+          <a:p>
+            <a:pPr>
+              <a:spcAft>
+                <a:spcPts val="600"/>
+              </a:spcAft>
+            </a:pPr>
+            <a:r>
+              <a:rPr sz="1500">
+                <a:solidFill>
+                  <a:srgbClr val="22282E"/>
+                </a:solidFill>
+              </a:rPr>
+              <a:t>•  Define los criterios de validación de erradicación.</a:t>
+            </a:r>
+          </a:p>
+          <a:p>
+            <a:pPr>
+              <a:spcAft>
+                <a:spcPts val="600"/>
+              </a:spcAft>
+            </a:pPr>
+            <a:r>
+              <a:rPr sz="1500">
+                <a:solidFill>
+                  <a:srgbClr val="22282E"/>
+                </a:solidFill>
+              </a:rPr>
+              <a:t>•  Explica cómo contener sin perder la memoria del equipo.</a:t>
+            </a:r>
+          </a:p>
+        </p:txBody>
+      </p:sp>
+    </p:spTree>
+  </p:cSld>
+  <p:clrMapOvr>
+    <a:masterClrMapping/>
+  </p:clrMapOvr>
+</p:sld>
+</file>
+
+<file path=ppt/slides/slide13.xml><?xml version="1.0" encoding="utf-8"?>
+<p:sld xmlns:a="http://schemas.openxmlformats.org/drawingml/2006/main" xmlns:p="http://schemas.openxmlformats.org/presentationml/2006/main" xmlns:r="http://schemas.openxmlformats.org/officeDocument/2006/relationships">
+  <p:cSld>
+    <p:spTree>
+      <p:nvGrpSpPr>
+        <p:cNvPr id="1" name=""/>
+        <p:cNvGrpSpPr/>
+        <p:nvPr/>
+      </p:nvGrpSpPr>
+      <p:grpSpPr/>
+      <p:sp>
+        <p:nvSpPr>
+          <p:cNvPr id="2" name="TextBox 1"/>
+          <p:cNvSpPr txBox="1"/>
+          <p:nvPr/>
+        </p:nvSpPr>
+        <p:spPr>
+          <a:xfrm>
+            <a:off x="457200" y="320040"/>
+            <a:ext cx="8229600" cy="822960"/>
+          </a:xfrm>
+          <a:prstGeom prst="rect">
+            <a:avLst/>
+          </a:prstGeom>
+          <a:noFill/>
+        </p:spPr>
+        <p:txBody>
+          <a:bodyPr wrap="square">
+            <a:spAutoFit/>
+          </a:bodyPr>
+          <a:lstStyle/>
+          <a:p>
+            <a:r>
+              <a:rPr sz="2600" b="1">
+                <a:solidFill>
+                  <a:srgbClr val="0B3D2E"/>
+                </a:solidFill>
+              </a:rPr>
+              <a:t>📝 Reto verificable</a:t>
+            </a:r>
+          </a:p>
+        </p:txBody>
+      </p:sp>
+      <p:sp>
+        <p:nvSpPr>
+          <p:cNvPr id="3" name="TextBox 2"/>
+          <p:cNvSpPr txBox="1"/>
+          <p:nvPr/>
+        </p:nvSpPr>
+        <p:spPr>
+          <a:xfrm>
+            <a:off x="457200" y="1280160"/>
+            <a:ext cx="8229600" cy="4937760"/>
+          </a:xfrm>
+          <a:prstGeom prst="rect">
+            <a:avLst/>
+          </a:prstGeom>
+          <a:noFill/>
+        </p:spPr>
+        <p:txBody>
+          <a:bodyPr wrap="square">
+            <a:spAutoFit/>
+          </a:bodyPr>
+          <a:lstStyle/>
+          <a:p>
+            <a:pPr>
+              <a:spcAft>
+                <a:spcPts val="600"/>
+              </a:spcAft>
+            </a:pPr>
+            <a:r>
+              <a:rPr sz="1500">
+                <a:solidFill>
+                  <a:srgbClr val="22282E"/>
+                </a:solidFill>
+              </a:rPr>
+              <a:t>•  En una VM comprometida por ti, ejecuta las tres fases: contiene documentando cambios sobre evidencia, busca y elimina la persistencia conocida mediante varias fuentes y valida recuperación con…</a:t>
+            </a:r>
+          </a:p>
+          <a:p>
+            <a:pPr>
+              <a:spcAft>
+                <a:spcPts val="600"/>
+              </a:spcAft>
+            </a:pPr>
+            <a:r>
+              <a:rPr sz="1500">
+                <a:solidFill>
+                  <a:srgbClr val="22282E"/>
+                </a:solidFill>
+              </a:rPr>
+              <a:t>•  Criterio de aceptación: documentas (a) cómo aislaste y qué evidencia pudo cambiar, (b) mecanismos de persistencia buscados, hallados y eliminados más límites de cobertura, (c) rotación y revocación…</a:t>
+            </a:r>
+          </a:p>
+        </p:txBody>
+      </p:sp>
+    </p:spTree>
+  </p:cSld>
+  <p:clrMapOvr>
+    <a:masterClrMapping/>
+  </p:clrMapOvr>
+</p:sld>
+</file>
+
+<file path=ppt/slides/slide14.xml><?xml version="1.0" encoding="utf-8"?>
+<p:sld xmlns:a="http://schemas.openxmlformats.org/drawingml/2006/main" xmlns:p="http://schemas.openxmlformats.org/presentationml/2006/main" xmlns:r="http://schemas.openxmlformats.org/officeDocument/2006/relationships">
+  <p:cSld>
+    <p:spTree>
+      <p:nvGrpSpPr>
+        <p:cNvPr id="1" name=""/>
+        <p:cNvGrpSpPr/>
+        <p:nvPr/>
+      </p:nvGrpSpPr>
+      <p:grpSpPr/>
+      <p:sp>
+        <p:nvSpPr>
+          <p:cNvPr id="2" name="TextBox 1"/>
+          <p:cNvSpPr txBox="1"/>
+          <p:nvPr/>
+        </p:nvSpPr>
+        <p:spPr>
+          <a:xfrm>
+            <a:off x="457200" y="320040"/>
+            <a:ext cx="8229600" cy="822960"/>
+          </a:xfrm>
+          <a:prstGeom prst="rect">
+            <a:avLst/>
+          </a:prstGeom>
+          <a:noFill/>
+        </p:spPr>
+        <p:txBody>
+          <a:bodyPr wrap="square">
+            <a:spAutoFit/>
+          </a:bodyPr>
+          <a:lstStyle/>
+          <a:p>
+            <a:r>
+              <a:rPr sz="2600" b="1">
+                <a:solidFill>
+                  <a:srgbClr val="0B3D2E"/>
+                </a:solidFill>
+              </a:rPr>
+              <a:t>⚠️ Errores comunes</a:t>
+            </a:r>
+          </a:p>
+        </p:txBody>
+      </p:sp>
+      <p:sp>
+        <p:nvSpPr>
+          <p:cNvPr id="3" name="TextBox 2"/>
+          <p:cNvSpPr txBox="1"/>
+          <p:nvPr/>
+        </p:nvSpPr>
+        <p:spPr>
+          <a:xfrm>
+            <a:off x="457200" y="1280160"/>
+            <a:ext cx="8229600" cy="4937760"/>
+          </a:xfrm>
+          <a:prstGeom prst="rect">
+            <a:avLst/>
+          </a:prstGeom>
+          <a:noFill/>
+        </p:spPr>
+        <p:txBody>
+          <a:bodyPr wrap="square">
+            <a:spAutoFit/>
+          </a:bodyPr>
+          <a:lstStyle/>
+          <a:p>
+            <a:pPr>
+              <a:spcAft>
+                <a:spcPts val="600"/>
+              </a:spcAft>
+            </a:pPr>
+            <a:r>
+              <a:rPr sz="1500">
+                <a:solidFill>
+                  <a:srgbClr val="22282E"/>
+                </a:solidFill>
+              </a:rPr>
+              <a:t>•  El malware reaparece tras limpiar — Quedó persistencia sin eliminar. Enumera TODA con Autoruns/cron/systemd.</a:t>
+            </a:r>
+          </a:p>
+          <a:p>
+            <a:pPr>
+              <a:spcAft>
+                <a:spcPts val="600"/>
+              </a:spcAft>
+            </a:pPr>
+            <a:r>
+              <a:rPr sz="1500">
+                <a:solidFill>
+                  <a:srgbClr val="22282E"/>
+                </a:solidFill>
+              </a:rPr>
+              <a:t>•  Perdiste la RAM al contener — Apagaste el equipo. Aísla por red, no por apagado.</a:t>
+            </a:r>
+          </a:p>
+          <a:p>
+            <a:pPr>
+              <a:spcAft>
+                <a:spcPts val="600"/>
+              </a:spcAft>
+            </a:pPr>
+            <a:r>
+              <a:rPr sz="1500">
+                <a:solidFill>
+                  <a:srgbClr val="22282E"/>
+                </a:solidFill>
+              </a:rPr>
+              <a:t>•  El atacante vuelve con la misma clave — No rotaste credenciales. Cámbialas y revoca sesiones.</a:t>
+            </a:r>
+          </a:p>
+          <a:p>
+            <a:pPr>
+              <a:spcAft>
+                <a:spcPts val="600"/>
+              </a:spcAft>
+            </a:pPr>
+            <a:r>
+              <a:rPr sz="1500">
+                <a:solidFill>
+                  <a:srgbClr val="22282E"/>
+                </a:solidFill>
+              </a:rPr>
+              <a:t>•  Limpiaste pero no confías en el host — Compromiso profundo. Reconstruye desde cero.</a:t>
+            </a:r>
+          </a:p>
+          <a:p>
+            <a:pPr>
+              <a:spcAft>
+                <a:spcPts val="600"/>
+              </a:spcAft>
+            </a:pPr>
+            <a:r>
+              <a:rPr sz="1500">
+                <a:solidFill>
+                  <a:srgbClr val="22282E"/>
+                </a:solidFill>
+              </a:rPr>
+              <a:t>•  Cerraste demasiado pronto — Sin periodo de validación. Monitorea antes de declarar resuelto.</a:t>
+            </a:r>
+          </a:p>
+        </p:txBody>
+      </p:sp>
+    </p:spTree>
+  </p:cSld>
+  <p:clrMapOvr>
+    <a:masterClrMapping/>
+  </p:clrMapOvr>
+</p:sld>
+</file>
+
+<file path=ppt/slides/slide15.xml><?xml version="1.0" encoding="utf-8"?>
+<p:sld xmlns:a="http://schemas.openxmlformats.org/drawingml/2006/main" xmlns:p="http://schemas.openxmlformats.org/presentationml/2006/main" xmlns:r="http://schemas.openxmlformats.org/officeDocument/2006/relationships">
+  <p:cSld>
+    <p:spTree>
+      <p:nvGrpSpPr>
+        <p:cNvPr id="1" name=""/>
+        <p:cNvGrpSpPr/>
+        <p:nvPr/>
+      </p:nvGrpSpPr>
+      <p:grpSpPr/>
+      <p:sp>
+        <p:nvSpPr>
+          <p:cNvPr id="2" name="TextBox 1"/>
+          <p:cNvSpPr txBox="1"/>
+          <p:nvPr/>
+        </p:nvSpPr>
+        <p:spPr>
+          <a:xfrm>
+            <a:off x="457200" y="320040"/>
+            <a:ext cx="8229600" cy="822960"/>
+          </a:xfrm>
+          <a:prstGeom prst="rect">
+            <a:avLst/>
+          </a:prstGeom>
+          <a:noFill/>
+        </p:spPr>
+        <p:txBody>
+          <a:bodyPr wrap="square">
+            <a:spAutoFit/>
+          </a:bodyPr>
+          <a:lstStyle/>
+          <a:p>
+            <a:r>
+              <a:rPr sz="2600" b="1">
+                <a:solidFill>
+                  <a:srgbClr val="0B3D2E"/>
+                </a:solidFill>
+              </a:rPr>
+              <a:t>❓ Preguntas frecuentes</a:t>
+            </a:r>
+          </a:p>
+        </p:txBody>
+      </p:sp>
+      <p:sp>
+        <p:nvSpPr>
+          <p:cNvPr id="3" name="TextBox 2"/>
+          <p:cNvSpPr txBox="1"/>
+          <p:nvPr/>
+        </p:nvSpPr>
+        <p:spPr>
+          <a:xfrm>
+            <a:off x="457200" y="1280160"/>
+            <a:ext cx="8229600" cy="4937760"/>
+          </a:xfrm>
+          <a:prstGeom prst="rect">
+            <a:avLst/>
+          </a:prstGeom>
+          <a:noFill/>
+        </p:spPr>
+        <p:txBody>
+          <a:bodyPr wrap="square">
+            <a:spAutoFit/>
+          </a:bodyPr>
+          <a:lstStyle/>
+          <a:p>
+            <a:pPr>
+              <a:spcAft>
+                <a:spcPts val="600"/>
+              </a:spcAft>
+            </a:pPr>
+            <a:r>
+              <a:rPr sz="1500">
+                <a:solidFill>
+                  <a:srgbClr val="22282E"/>
+                </a:solidFill>
+              </a:rPr>
+              <a:t>•  ❓ ¿Aislar u observar?</a:t>
+            </a:r>
+          </a:p>
+          <a:p>
+            <a:pPr>
+              <a:spcAft>
+                <a:spcPts val="600"/>
+              </a:spcAft>
+            </a:pPr>
+            <a:r>
+              <a:rPr sz="1500">
+                <a:solidFill>
+                  <a:srgbClr val="22282E"/>
+                </a:solidFill>
+              </a:rPr>
+              <a:t>•  Aísla si el riesgo de daño es alto; observa solo si necesitas inteligencia y puedes contener el daño. Ante la duda, aísla.</a:t>
+            </a:r>
+          </a:p>
+          <a:p>
+            <a:pPr>
+              <a:spcAft>
+                <a:spcPts val="600"/>
+              </a:spcAft>
+            </a:pPr>
+            <a:r>
+              <a:rPr sz="1500">
+                <a:solidFill>
+                  <a:srgbClr val="22282E"/>
+                </a:solidFill>
+              </a:rPr>
+              <a:t>•  ❓ ¿Limpiar o reconstruir?</a:t>
+            </a:r>
+          </a:p>
+          <a:p>
+            <a:pPr>
+              <a:spcAft>
+                <a:spcPts val="600"/>
+              </a:spcAft>
+            </a:pPr>
+            <a:r>
+              <a:rPr sz="1500">
+                <a:solidFill>
+                  <a:srgbClr val="22282E"/>
+                </a:solidFill>
+              </a:rPr>
+              <a:t>•  Ante compromiso con privilegios altos o rootkits, reconstruir desde una base validada suele reducir más incertidumbre que limpiar. También debes revisar firmware, identidad, datos, imágenes y…</a:t>
+            </a:r>
+          </a:p>
+          <a:p>
+            <a:pPr>
+              <a:spcAft>
+                <a:spcPts val="600"/>
+              </a:spcAft>
+            </a:pPr>
+            <a:r>
+              <a:rPr sz="1500">
+                <a:solidFill>
+                  <a:srgbClr val="22282E"/>
+                </a:solidFill>
+              </a:rPr>
+              <a:t>•  ❓ ¿Cuándo roto credenciales?</a:t>
+            </a:r>
+          </a:p>
+          <a:p>
+            <a:pPr>
+              <a:spcAft>
+                <a:spcPts val="600"/>
+              </a:spcAft>
+            </a:pPr>
+            <a:r>
+              <a:rPr sz="1500">
+                <a:solidFill>
+                  <a:srgbClr val="22282E"/>
+                </a:solidFill>
+              </a:rPr>
+              <a:t>•  Cuando el alcance indique acceso posible o exposición: contraseñas, tokens, claves API y secretos de servicio. Define el orden para revocar sesiones antes de emitir reemplazos utilizables.</a:t>
+            </a:r>
+          </a:p>
+          <a:p>
+            <a:pPr>
+              <a:spcAft>
+                <a:spcPts val="600"/>
+              </a:spcAft>
+            </a:pPr>
+            <a:r>
+              <a:rPr sz="1500">
+                <a:solidFill>
+                  <a:srgbClr val="22282E"/>
+                </a:solidFill>
+              </a:rPr>
+              <a:t>•  ❓ ¿Cómo sé que erradiqué de verdad?</a:t>
+            </a:r>
+          </a:p>
+        </p:txBody>
+      </p:sp>
+    </p:spTree>
+  </p:cSld>
+  <p:clrMapOvr>
+    <a:masterClrMapping/>
+  </p:clrMapOvr>
+</p:sld>
+</file>
+
+<file path=ppt/slides/slide16.xml><?xml version="1.0" encoding="utf-8"?>
+<p:sld xmlns:a="http://schemas.openxmlformats.org/drawingml/2006/main" xmlns:p="http://schemas.openxmlformats.org/presentationml/2006/main" xmlns:r="http://schemas.openxmlformats.org/officeDocument/2006/relationships">
+  <p:cSld>
+    <p:spTree>
+      <p:nvGrpSpPr>
+        <p:cNvPr id="1" name=""/>
+        <p:cNvGrpSpPr/>
+        <p:nvPr/>
+      </p:nvGrpSpPr>
+      <p:grpSpPr/>
+      <p:sp>
+        <p:nvSpPr>
+          <p:cNvPr id="2" name="TextBox 1"/>
+          <p:cNvSpPr txBox="1"/>
+          <p:nvPr/>
+        </p:nvSpPr>
+        <p:spPr>
+          <a:xfrm>
+            <a:off x="457200" y="320040"/>
+            <a:ext cx="8229600" cy="822960"/>
+          </a:xfrm>
+          <a:prstGeom prst="rect">
+            <a:avLst/>
+          </a:prstGeom>
+          <a:noFill/>
+        </p:spPr>
+        <p:txBody>
+          <a:bodyPr wrap="square">
+            <a:spAutoFit/>
+          </a:bodyPr>
+          <a:lstStyle/>
+          <a:p>
+            <a:r>
+              <a:rPr sz="2600" b="1">
+                <a:solidFill>
+                  <a:srgbClr val="0B3D2E"/>
+                </a:solidFill>
+              </a:rPr>
+              <a:t>🔗 Referencias verificables y alcance</a:t>
+            </a:r>
+          </a:p>
+        </p:txBody>
+      </p:sp>
+      <p:sp>
+        <p:nvSpPr>
+          <p:cNvPr id="3" name="TextBox 2"/>
+          <p:cNvSpPr txBox="1"/>
+          <p:nvPr/>
+        </p:nvSpPr>
+        <p:spPr>
+          <a:xfrm>
+            <a:off x="457200" y="1280160"/>
+            <a:ext cx="8229600" cy="4937760"/>
+          </a:xfrm>
+          <a:prstGeom prst="rect">
+            <a:avLst/>
+          </a:prstGeom>
+          <a:noFill/>
+        </p:spPr>
+        <p:txBody>
+          <a:bodyPr wrap="square">
+            <a:spAutoFit/>
+          </a:bodyPr>
+          <a:lstStyle/>
+          <a:p>
+            <a:pPr>
+              <a:spcAft>
+                <a:spcPts val="600"/>
+              </a:spcAft>
+            </a:pPr>
+            <a:r>
+              <a:rPr sz="1500">
+                <a:solidFill>
+                  <a:srgbClr val="22282E"/>
+                </a:solidFill>
+              </a:rPr>
+              <a:t>•  NIST SP 800-61 Rev. 3: &lt;https://doi.org/10.6028/NIST.SP.800-61r3&gt; — recomendaciones actuales para integrar preparación, detección, respuesta y recuperación con CSF 2.0.</a:t>
+            </a:r>
+          </a:p>
+          <a:p>
+            <a:pPr>
+              <a:spcAft>
+                <a:spcPts val="600"/>
+              </a:spcAft>
+            </a:pPr>
+            <a:r>
+              <a:rPr sz="1500">
+                <a:solidFill>
+                  <a:srgbClr val="22282E"/>
+                </a:solidFill>
+              </a:rPr>
+              <a:t>•  Sysinternals Autoruns: &lt;https://learn.microsoft.com/sysinternals/downloads/autoruns&gt; — documentación oficial para ubicaciones de inicio automático Windows; no cubre todas las formas de acceso…</a:t>
+            </a:r>
+          </a:p>
+          <a:p>
+            <a:pPr>
+              <a:spcAft>
+                <a:spcPts val="600"/>
+              </a:spcAft>
+            </a:pPr>
+            <a:r>
+              <a:rPr sz="1500">
+                <a:solidFill>
+                  <a:srgbClr val="22282E"/>
+                </a:solidFill>
+              </a:rPr>
+              <a:t>•  MITRE ATT&amp;CK — Persistence: &lt;https://attack.mitre.org/tactics/TA0003/&gt; — taxonomía de comportamientos para ampliar búsquedas; la cobertura depende de fuentes disponibles.</a:t>
+            </a:r>
+          </a:p>
+          <a:p>
+            <a:pPr>
+              <a:spcAft>
+                <a:spcPts val="600"/>
+              </a:spcAft>
+            </a:pPr>
+            <a:r>
+              <a:rPr sz="1500">
+                <a:solidFill>
+                  <a:srgbClr val="22282E"/>
+                </a:solidFill>
+              </a:rPr>
+              <a:t>•  CISA Incident Response Playbook: &lt;https://www.cisa.gov/sites/default/files/publications/CybersecurityIncidentVulnerabilityResponsePlaybooks508C.pdf&gt; — ejemplo oficial de acciones y coordinación…</a:t>
+            </a:r>
+          </a:p>
+        </p:txBody>
+      </p:sp>
+    </p:spTree>
+  </p:cSld>
+  <p:clrMapOvr>
+    <a:masterClrMapping/>
+  </p:clrMapOvr>
+</p:sld>
+</file>
+
+<file path=ppt/slides/slide17.xml><?xml version="1.0" encoding="utf-8"?>
+<p:sld xmlns:a="http://schemas.openxmlformats.org/drawingml/2006/main" xmlns:p="http://schemas.openxmlformats.org/presentationml/2006/main" xmlns:r="http://schemas.openxmlformats.org/officeDocument/2006/relationships">
+  <p:cSld>
+    <p:spTree>
+      <p:nvGrpSpPr>
+        <p:cNvPr id="1" name=""/>
+        <p:cNvGrpSpPr/>
+        <p:nvPr/>
+      </p:nvGrpSpPr>
+      <p:grpSpPr/>
+      <p:sp>
+        <p:nvSpPr>
+          <p:cNvPr id="2" name="TextBox 1"/>
+          <p:cNvSpPr txBox="1"/>
+          <p:nvPr/>
+        </p:nvSpPr>
+        <p:spPr>
+          <a:xfrm>
+            <a:off x="457200" y="274320"/>
+            <a:ext cx="8229600" cy="640080"/>
+          </a:xfrm>
+          <a:prstGeom prst="rect">
+            <a:avLst/>
+          </a:prstGeom>
+          <a:noFill/>
+        </p:spPr>
+        <p:txBody>
+          <a:bodyPr wrap="square">
+            <a:spAutoFit/>
+          </a:bodyPr>
+          <a:lstStyle/>
+          <a:p>
+            <a:r>
+              <a:rPr sz="2200" b="1">
+                <a:solidFill>
+                  <a:srgbClr val="0B3D2E"/>
+                </a:solidFill>
+              </a:rPr>
+              <a:t>Diagrama de la clase</a:t>
+            </a:r>
+          </a:p>
+        </p:txBody>
+      </p:sp>
+      <p:pic>
+        <p:nvPicPr>
+          <p:cNvPr id="3" name="Picture 2" descr="af0c0af6bc763cd3.png"/>
+          <p:cNvPicPr>
+            <a:picLocks noChangeAspect="1"/>
+          </p:cNvPicPr>
+          <p:nvPr/>
+        </p:nvPicPr>
+        <p:blipFill>
+          <a:blip r:embed="rId2"/>
+          <a:stretch>
+            <a:fillRect/>
+          </a:stretch>
+        </p:blipFill>
+        <p:spPr>
+          <a:xfrm>
+            <a:off x="457200" y="3424428"/>
+            <a:ext cx="8229600" cy="649224"/>
+          </a:xfrm>
+          <a:prstGeom prst="rect">
+            <a:avLst/>
+          </a:prstGeom>
+        </p:spPr>
+      </p:pic>
     </p:spTree>
   </p:cSld>
   <p:clrMapOvr>
@@ -3698,7 +4359,7 @@
                   <a:srgbClr val="22282E"/>
                 </a:solidFill>
               </a:rPr>
-              <a:t>•  Dominar las tres fases centrales de la respuesta: contener la amenaza sin destruir evidencia, erradicar la causa raíz por completo y recuperar la operación con confianza. Al terminar sabrás decidir entre aislar u observar, eliminar toda la persistencia y validar que el atacante realmente se fue.</a:t>
+              <a:t>•  Dominar tres grupos de trabajo de la respuesta: contener reduciendo impacto y preservando evidencia pertinente, erradicar accesos y condiciones dentro del alcance conocido, y recuperar la operación…</a:t>
             </a:r>
           </a:p>
         </p:txBody>
@@ -3832,7 +4493,7 @@
                   <a:srgbClr val="22282E"/>
                 </a:solidFill>
               </a:rPr>
-              <a:t>•  Erradicar malware y persistencia de forma completa.</a:t>
+              <a:t>•  Erradicar malware, acceso y persistencia dentro del alcance investigado.</a:t>
             </a:r>
           </a:p>
           <a:p>
@@ -4092,7 +4753,7 @@
                   <a:srgbClr val="0B3D2E"/>
                 </a:solidFill>
               </a:rPr>
-              <a:t>📖 Definiciones y características</a:t>
+              <a:t>🧠 Explicación en profundidad</a:t>
             </a:r>
           </a:p>
         </p:txBody>
@@ -4130,97 +4791,97 @@
                   <a:srgbClr val="22282E"/>
                 </a:solidFill>
               </a:rPr>
-              <a:t>•  Contención a corto plazo: acción inmediata para frenar la propagación (aislar un host). Característica: rápida, a veces temporal.</a:t>
-            </a:r>
-          </a:p>
-          <a:p>
-            <a:pPr>
-              <a:spcAft>
-                <a:spcPts val="600"/>
-              </a:spcAft>
-            </a:pPr>
-            <a:r>
-              <a:rPr sz="1500">
-                <a:solidFill>
-                  <a:srgbClr val="22282E"/>
-                </a:solidFill>
-              </a:rPr>
-              <a:t>•  Contención a largo plazo: medida estable mientras se erradica (segmentar red, regla de firewall). Característica: mantiene operación sin dar terreno.</a:t>
-            </a:r>
-          </a:p>
-          <a:p>
-            <a:pPr>
-              <a:spcAft>
-                <a:spcPts val="600"/>
-              </a:spcAft>
-            </a:pPr>
-            <a:r>
-              <a:rPr sz="1500">
-                <a:solidFill>
-                  <a:srgbClr val="22282E"/>
-                </a:solidFill>
-              </a:rPr>
-              <a:t>•  Aislar vs. observar: cortar al atacante ya, o vigilarlo para ganar inteligencia. Característica: observar arriesga más daño pero revela alcance.</a:t>
-            </a:r>
-          </a:p>
-          <a:p>
-            <a:pPr>
-              <a:spcAft>
-                <a:spcPts val="600"/>
-              </a:spcAft>
-            </a:pPr>
-            <a:r>
-              <a:rPr sz="1500">
-                <a:solidFill>
-                  <a:srgbClr val="22282E"/>
-                </a:solidFill>
-              </a:rPr>
-              <a:t>•  Erradicación: eliminar la causa (malware, cuentas, vulnerabilidad, persistencia). Característica: incompleta si queda un solo mecanismo.</a:t>
-            </a:r>
-          </a:p>
-          <a:p>
-            <a:pPr>
-              <a:spcAft>
-                <a:spcPts val="600"/>
-              </a:spcAft>
-            </a:pPr>
-            <a:r>
-              <a:rPr sz="1500">
-                <a:solidFill>
-                  <a:srgbClr val="22282E"/>
-                </a:solidFill>
-              </a:rPr>
-              <a:t>•  Persistencia: mecanismos del atacante para sobrevivir a reinicios (servicios, tareas, claves). Característica: hay que enumerarlos todos.</a:t>
-            </a:r>
-          </a:p>
-          <a:p>
-            <a:pPr>
-              <a:spcAft>
-                <a:spcPts val="600"/>
-              </a:spcAft>
-            </a:pPr>
-            <a:r>
-              <a:rPr sz="1500">
-                <a:solidFill>
-                  <a:srgbClr val="22282E"/>
-                </a:solidFill>
-              </a:rPr>
-              <a:t>•  Reconstrucción (rebuild): reinstalar desde cero. Característica: la única garantía plena tras un compromiso profundo.</a:t>
-            </a:r>
-          </a:p>
-          <a:p>
-            <a:pPr>
-              <a:spcAft>
-                <a:spcPts val="600"/>
-              </a:spcAft>
-            </a:pPr>
-            <a:r>
-              <a:rPr sz="1500">
-                <a:solidFill>
-                  <a:srgbClr val="22282E"/>
-                </a:solidFill>
-              </a:rPr>
-              <a:t>•  Validación: confirmar que no hay actividad maliciosa residual. Característica: monitoreo reforzado por un periodo.</a:t>
+              <a:t>•  Contener limita impacto; erradicar elimina causas y persistencia; recuperar restablece servicio confiable. Aislar demasiado pronto puede cortar C2 y también alertar al adversario, perder evidencia o…</a:t>
+            </a:r>
+          </a:p>
+          <a:p>
+            <a:pPr>
+              <a:spcAft>
+                <a:spcPts val="600"/>
+              </a:spcAft>
+            </a:pPr>
+            <a:r>
+              <a:rPr sz="1500">
+                <a:solidFill>
+                  <a:srgbClr val="22282E"/>
+                </a:solidFill>
+              </a:rPr>
+              <a:t>•  Erradicación incluye credenciales, tokens, reglas cloud y vectores, no solo borrar malware. Recuperar desde backup requiere comprobar que el backup precede al compromiso y no conserva persistencia.…</a:t>
+            </a:r>
+          </a:p>
+          <a:p>
+            <a:pPr>
+              <a:spcAft>
+                <a:spcPts val="600"/>
+              </a:spcAft>
+            </a:pPr>
+            <a:r>
+              <a:rPr sz="1500">
+                <a:solidFill>
+                  <a:srgbClr val="22282E"/>
+                </a:solidFill>
+              </a:rPr>
+              <a:t>•  La contención inmediata busca frenar daño; la de largo plazo crea un estado sostenible mientras se comprende y erradica. Aislar un endpoint desde EDR, bloquear una cuenta, segmentar una subred o…</a:t>
+            </a:r>
+          </a:p>
+          <a:p>
+            <a:pPr>
+              <a:spcAft>
+                <a:spcPts val="600"/>
+              </a:spcAft>
+            </a:pPr>
+            <a:r>
+              <a:rPr sz="1500">
+                <a:solidFill>
+                  <a:srgbClr val="22282E"/>
+                </a:solidFill>
+              </a:rPr>
+              <a:t>•  Observar al adversario puede ampliar inteligencia, pero también permite daño adicional. Solo se justifica con autoridad, monitoreo, límites de tiempo y criterios de interrupción. En la mayoría de…</a:t>
+            </a:r>
+          </a:p>
+          <a:p>
+            <a:pPr>
+              <a:spcAft>
+                <a:spcPts val="600"/>
+              </a:spcAft>
+            </a:pPr>
+            <a:r>
+              <a:rPr sz="1500">
+                <a:solidFill>
+                  <a:srgbClr val="22282E"/>
+                </a:solidFill>
+              </a:rPr>
+              <a:t>•  Borrar el binario visible no revoca tokens, claves API, tareas, servicios, aplicaciones OAuth, reglas de reenvío ni vulnerabilidades explotadas. Se construye una matriz de activos, identidades…</a:t>
+            </a:r>
+          </a:p>
+          <a:p>
+            <a:pPr>
+              <a:spcAft>
+                <a:spcPts val="600"/>
+              </a:spcAft>
+            </a:pPr>
+            <a:r>
+              <a:rPr sz="1500">
+                <a:solidFill>
+                  <a:srgbClr val="22282E"/>
+                </a:solidFill>
+              </a:rPr>
+              <a:t>•  La reconstrucción desde una imagen confiable suele reducir incertidumbre frente a una limpieza compleja, pero tampoco es una «garantía plena»: firmware, credenciales, imágenes base, automatización y…</a:t>
+            </a:r>
+          </a:p>
+          <a:p>
+            <a:pPr>
+              <a:spcAft>
+                <a:spcPts val="600"/>
+              </a:spcAft>
+            </a:pPr>
+            <a:r>
+              <a:rPr sz="1500">
+                <a:solidFill>
+                  <a:srgbClr val="22282E"/>
+                </a:solidFill>
+              </a:rPr>
+              <a:t>•  La recuperación define servicio mínimo, criterios de salud, dependencias, validación de datos y plan de reversión. Los sistemas vuelven por etapas y con telemetría reforzada. Una ausencia breve de…</a:t>
             </a:r>
           </a:p>
         </p:txBody>
@@ -4271,7 +4932,7 @@
                   <a:srgbClr val="0B3D2E"/>
                 </a:solidFill>
               </a:rPr>
-              <a:t>🧰 Herramientas y preparación</a:t>
+              <a:t>📔 Glosario</a:t>
             </a:r>
           </a:p>
         </p:txBody>
@@ -4309,52 +4970,97 @@
                   <a:srgbClr val="22282E"/>
                 </a:solidFill>
               </a:rPr>
-              <a:t>•  Contención: reglas de firewall/EDR para aislar, VLAN de cuarentena.</a:t>
-            </a:r>
-          </a:p>
-          <a:p>
-            <a:pPr>
-              <a:spcAft>
-                <a:spcPts val="600"/>
-              </a:spcAft>
-            </a:pPr>
-            <a:r>
-              <a:rPr sz="1500">
-                <a:solidFill>
-                  <a:srgbClr val="22282E"/>
-                </a:solidFill>
-              </a:rPr>
-              <a:t>•  Erradicación: EDR (aislar y remediar), autoruns (persistencia Windows), revisión de cron/systemd (Linux).</a:t>
-            </a:r>
-          </a:p>
-          <a:p>
-            <a:pPr>
-              <a:spcAft>
-                <a:spcPts val="600"/>
-              </a:spcAft>
-            </a:pPr>
-            <a:r>
-              <a:rPr sz="1500">
-                <a:solidFill>
-                  <a:srgbClr val="22282E"/>
-                </a:solidFill>
-              </a:rPr>
-              <a:t>•  Credenciales: gestor de secretos, rotación de claves, revocación de sesiones/tokens.</a:t>
-            </a:r>
-          </a:p>
-          <a:p>
-            <a:pPr>
-              <a:spcAft>
-                <a:spcPts val="600"/>
-              </a:spcAft>
-            </a:pPr>
-            <a:r>
-              <a:rPr sz="1500">
-                <a:solidFill>
-                  <a:srgbClr val="22282E"/>
-                </a:solidFill>
-              </a:rPr>
-              <a:t>•  Ejercicio aplicado: diseño y práctica en laboratorio propio.</a:t>
+              <a:t>•  Contención corta/larga: medidas inmediatas y sostenibles.</a:t>
+            </a:r>
+          </a:p>
+          <a:p>
+            <a:pPr>
+              <a:spcAft>
+                <a:spcPts val="600"/>
+              </a:spcAft>
+            </a:pPr>
+            <a:r>
+              <a:rPr sz="1500">
+                <a:solidFill>
+                  <a:srgbClr val="22282E"/>
+                </a:solidFill>
+              </a:rPr>
+              <a:t>•  Erradicación: eliminación de causa y persistencia.</a:t>
+            </a:r>
+          </a:p>
+          <a:p>
+            <a:pPr>
+              <a:spcAft>
+                <a:spcPts val="600"/>
+              </a:spcAft>
+            </a:pPr>
+            <a:r>
+              <a:rPr sz="1500">
+                <a:solidFill>
+                  <a:srgbClr val="22282E"/>
+                </a:solidFill>
+              </a:rPr>
+              <a:t>•  Recovery: retorno controlado a operación.</a:t>
+            </a:r>
+          </a:p>
+          <a:p>
+            <a:pPr>
+              <a:spcAft>
+                <a:spcPts val="600"/>
+              </a:spcAft>
+            </a:pPr>
+            <a:r>
+              <a:rPr sz="1500">
+                <a:solidFill>
+                  <a:srgbClr val="22282E"/>
+                </a:solidFill>
+              </a:rPr>
+              <a:t>•  Known-good: estado cuya confianza fue validada.</a:t>
+            </a:r>
+          </a:p>
+          <a:p>
+            <a:pPr>
+              <a:spcAft>
+                <a:spcPts val="600"/>
+              </a:spcAft>
+            </a:pPr>
+            <a:r>
+              <a:rPr sz="1500">
+                <a:solidFill>
+                  <a:srgbClr val="22282E"/>
+                </a:solidFill>
+              </a:rPr>
+              <a:t>•  Recaída: reaparición de actividad relacionada.</a:t>
+            </a:r>
+          </a:p>
+          <a:p>
+            <a:pPr>
+              <a:spcAft>
+                <a:spcPts val="600"/>
+              </a:spcAft>
+            </a:pPr>
+            <a:r>
+              <a:rPr sz="1500">
+                <a:solidFill>
+                  <a:srgbClr val="22282E"/>
+                </a:solidFill>
+              </a:rPr>
+              <a:t>•  Blast radius: alcance potencial del daño.</a:t>
+            </a:r>
+          </a:p>
+          <a:p>
+            <a:pPr>
+              <a:spcAft>
+                <a:spcPts val="600"/>
+              </a:spcAft>
+            </a:pPr>
+            <a:r>
+              <a:rPr sz="1500">
+                <a:solidFill>
+                  <a:srgbClr val="22282E"/>
+                </a:solidFill>
+              </a:rPr>
+              <a:t>•  Monitoring reforzado: vigilancia temporal tras restauración.</a:t>
             </a:r>
           </a:p>
         </p:txBody>
@@ -4405,7 +5111,7 @@
                   <a:srgbClr val="0B3D2E"/>
                 </a:solidFill>
               </a:rPr>
-              <a:t>🧪 Laboratorio guiado</a:t>
+              <a:t>📖 Definiciones y características</a:t>
             </a:r>
           </a:p>
         </p:txBody>
@@ -4443,97 +5149,97 @@
                   <a:srgbClr val="22282E"/>
                 </a:solidFill>
               </a:rPr>
-              <a:t>•  Contén el host aislándolo por red sin apagarlo (preservas RAM y estado):</a:t>
-            </a:r>
-          </a:p>
-          <a:p>
-            <a:pPr>
-              <a:spcAft>
-                <a:spcPts val="600"/>
-              </a:spcAft>
-            </a:pPr>
-            <a:r>
-              <a:rPr sz="1500">
-                <a:solidFill>
-                  <a:srgbClr val="22282E"/>
-                </a:solidFill>
-              </a:rPr>
-              <a:t>•  EDR: acción "aislar"; o regla de firewall que solo permita la IP del analista.</a:t>
-            </a:r>
-          </a:p>
-          <a:p>
-            <a:pPr>
-              <a:spcAft>
-                <a:spcPts val="600"/>
-              </a:spcAft>
-            </a:pPr>
-            <a:r>
-              <a:rPr sz="1500">
-                <a:solidFill>
-                  <a:srgbClr val="22282E"/>
-                </a:solidFill>
-              </a:rPr>
-              <a:t>•  Antes de erradicar, captura evidencia: volcado de RAM (clase 207) e imagen de disco (clase 203).</a:t>
-            </a:r>
-          </a:p>
-          <a:p>
-            <a:pPr>
-              <a:spcAft>
-                <a:spcPts val="600"/>
-              </a:spcAft>
-            </a:pPr>
-            <a:r>
-              <a:rPr sz="1500">
-                <a:solidFill>
-                  <a:srgbClr val="22282E"/>
-                </a:solidFill>
-              </a:rPr>
-              <a:t>•  Enumera la persistencia en Windows con Autoruns:</a:t>
-            </a:r>
-          </a:p>
-          <a:p>
-            <a:pPr>
-              <a:spcAft>
-                <a:spcPts val="600"/>
-              </a:spcAft>
-            </a:pPr>
-            <a:r>
-              <a:rPr sz="1500">
-                <a:solidFill>
-                  <a:srgbClr val="22282E"/>
-                </a:solidFill>
-              </a:rPr>
-              <a:t>•  autorunsc.exe -a  -c &gt; autoruns.csv</a:t>
-            </a:r>
-          </a:p>
-          <a:p>
-            <a:pPr>
-              <a:spcAft>
-                <a:spcPts val="600"/>
-              </a:spcAft>
-            </a:pPr>
-            <a:r>
-              <a:rPr sz="1500">
-                <a:solidFill>
-                  <a:srgbClr val="22282E"/>
-                </a:solidFill>
-              </a:rPr>
-              <a:t>•  Revisa servicios, tareas programadas, claves Run, y WMI.</a:t>
-            </a:r>
-          </a:p>
-          <a:p>
-            <a:pPr>
-              <a:spcAft>
-                <a:spcPts val="600"/>
-              </a:spcAft>
-            </a:pPr>
-            <a:r>
-              <a:rPr sz="1500">
-                <a:solidFill>
-                  <a:srgbClr val="22282E"/>
-                </a:solidFill>
-              </a:rPr>
-              <a:t>•  En Linux, revisa cron, systemd y perfiles de shell (clase 206) para hallar toda la persistencia.</a:t>
+              <a:t>•  Contención a corto plazo: acción inmediata para frenar la propagación (aislar un host). Característica: rápida, a veces temporal.</a:t>
+            </a:r>
+          </a:p>
+          <a:p>
+            <a:pPr>
+              <a:spcAft>
+                <a:spcPts val="600"/>
+              </a:spcAft>
+            </a:pPr>
+            <a:r>
+              <a:rPr sz="1500">
+                <a:solidFill>
+                  <a:srgbClr val="22282E"/>
+                </a:solidFill>
+              </a:rPr>
+              <a:t>•  Contención a largo plazo: medida estable mientras se erradica (segmentar red, regla de firewall). Característica: mantiene operación sin dar terreno.</a:t>
+            </a:r>
+          </a:p>
+          <a:p>
+            <a:pPr>
+              <a:spcAft>
+                <a:spcPts val="600"/>
+              </a:spcAft>
+            </a:pPr>
+            <a:r>
+              <a:rPr sz="1500">
+                <a:solidFill>
+                  <a:srgbClr val="22282E"/>
+                </a:solidFill>
+              </a:rPr>
+              <a:t>•  Aislar vs. observar: cortar al atacante ya, o vigilarlo para ganar inteligencia. Característica: observar arriesga más daño pero revela alcance.</a:t>
+            </a:r>
+          </a:p>
+          <a:p>
+            <a:pPr>
+              <a:spcAft>
+                <a:spcPts val="600"/>
+              </a:spcAft>
+            </a:pPr>
+            <a:r>
+              <a:rPr sz="1500">
+                <a:solidFill>
+                  <a:srgbClr val="22282E"/>
+                </a:solidFill>
+              </a:rPr>
+              <a:t>•  Erradicación: eliminar acceso, persistencia y condiciones explotadas dentro del alcance conocido. Característica: requiere verificación por activo e identidad.</a:t>
+            </a:r>
+          </a:p>
+          <a:p>
+            <a:pPr>
+              <a:spcAft>
+                <a:spcPts val="600"/>
+              </a:spcAft>
+            </a:pPr>
+            <a:r>
+              <a:rPr sz="1500">
+                <a:solidFill>
+                  <a:srgbClr val="22282E"/>
+                </a:solidFill>
+              </a:rPr>
+              <a:t>•  Persistencia: mecanismos para conservar acceso o efecto, incluidos servicios, tareas, identidades y configuraciones cloud. Característica: se enumeran mediante varias fuentes porque ninguna lista…</a:t>
+            </a:r>
+          </a:p>
+          <a:p>
+            <a:pPr>
+              <a:spcAft>
+                <a:spcPts val="600"/>
+              </a:spcAft>
+            </a:pPr>
+            <a:r>
+              <a:rPr sz="1500">
+                <a:solidFill>
+                  <a:srgbClr val="22282E"/>
+                </a:solidFill>
+              </a:rPr>
+              <a:t>•  Reconstrucción (rebuild): desplegar desde una base declarada confiable. Característica: reduce incertidumbre si también se validan imagen, credenciales, firmware, datos y configuración.</a:t>
+            </a:r>
+          </a:p>
+          <a:p>
+            <a:pPr>
+              <a:spcAft>
+                <a:spcPts val="600"/>
+              </a:spcAft>
+            </a:pPr>
+            <a:r>
+              <a:rPr sz="1500">
+                <a:solidFill>
+                  <a:srgbClr val="22282E"/>
+                </a:solidFill>
+              </a:rPr>
+              <a:t>•  Validación: comprobar criterios de salud, telemetría y ausencia de comportamientos conocidos durante una ventana justificada. Característica: reduce incertidumbre, sin demostrar una ausencia absoluta.</a:t>
             </a:r>
           </a:p>
         </p:txBody>
@@ -4584,7 +5290,7 @@
                   <a:srgbClr val="0B3D2E"/>
                 </a:solidFill>
               </a:rPr>
-              <a:t>✍️ Ejercicios</a:t>
+              <a:t>🔍 Caso razonado — credencial de dominio usada en varios sistemas</a:t>
             </a:r>
           </a:p>
         </p:txBody>
@@ -4622,82 +5328,22 @@
                   <a:srgbClr val="22282E"/>
                 </a:solidFill>
               </a:rPr>
-              <a:t>•  Decide para tres escenarios si aislar u observar, y justifícalo.</a:t>
-            </a:r>
-          </a:p>
-          <a:p>
-            <a:pPr>
-              <a:spcAft>
-                <a:spcPts val="600"/>
-              </a:spcAft>
-            </a:pPr>
-            <a:r>
-              <a:rPr sz="1500">
-                <a:solidFill>
-                  <a:srgbClr val="22282E"/>
-                </a:solidFill>
-              </a:rPr>
-              <a:t>•  Enumera cinco mecanismos de persistencia en Windows.</a:t>
-            </a:r>
-          </a:p>
-          <a:p>
-            <a:pPr>
-              <a:spcAft>
-                <a:spcPts val="600"/>
-              </a:spcAft>
-            </a:pPr>
-            <a:r>
-              <a:rPr sz="1500">
-                <a:solidFill>
-                  <a:srgbClr val="22282E"/>
-                </a:solidFill>
-              </a:rPr>
-              <a:t>•  Explica por qué a veces la única opción es reconstruir.</a:t>
-            </a:r>
-          </a:p>
-          <a:p>
-            <a:pPr>
-              <a:spcAft>
-                <a:spcPts val="600"/>
-              </a:spcAft>
-            </a:pPr>
-            <a:r>
-              <a:rPr sz="1500">
-                <a:solidFill>
-                  <a:srgbClr val="22282E"/>
-                </a:solidFill>
-              </a:rPr>
-              <a:t>•  Diseña un plan de rotación de credenciales tras un compromiso.</a:t>
-            </a:r>
-          </a:p>
-          <a:p>
-            <a:pPr>
-              <a:spcAft>
-                <a:spcPts val="600"/>
-              </a:spcAft>
-            </a:pPr>
-            <a:r>
-              <a:rPr sz="1500">
-                <a:solidFill>
-                  <a:srgbClr val="22282E"/>
-                </a:solidFill>
-              </a:rPr>
-              <a:t>•  Define los criterios de validación de erradicación.</a:t>
-            </a:r>
-          </a:p>
-          <a:p>
-            <a:pPr>
-              <a:spcAft>
-                <a:spcPts val="600"/>
-              </a:spcAft>
-            </a:pPr>
-            <a:r>
-              <a:rPr sz="1500">
-                <a:solidFill>
-                  <a:srgbClr val="22282E"/>
-                </a:solidFill>
-              </a:rPr>
-              <a:t>•  Explica cómo contener sin perder la memoria del equipo.</a:t>
+              <a:t>•  Un servidor muestra una herramienta remota y autenticaciones de una cuenta administrativa hacia tres hosts. Aislar solo el servidor limita una ruta, pero la identidad permite continuar. El equipo…</a:t>
+            </a:r>
+          </a:p>
+          <a:p>
+            <a:pPr>
+              <a:spcAft>
+                <a:spcPts val="600"/>
+              </a:spcAft>
+            </a:pPr>
+            <a:r>
+              <a:rPr sz="1500">
+                <a:solidFill>
+                  <a:srgbClr val="22282E"/>
+                </a:solidFill>
+              </a:rPr>
+              <a:t>•  Dos hosts se reconstruyen desde una imagen validada; el tercero se conserva para análisis porque contiene evidencia única. Antes de reconectar, se corrige el vector inicial, se aplican controles, se…</a:t>
             </a:r>
           </a:p>
         </p:txBody>
@@ -4748,7 +5394,7 @@
                   <a:srgbClr val="0B3D2E"/>
                 </a:solidFill>
               </a:rPr>
-              <a:t>📝 Reto verificable</a:t>
+              <a:t>✅ Criterio de dominio</a:t>
             </a:r>
           </a:p>
         </p:txBody>
@@ -4786,22 +5432,7 @@
                   <a:srgbClr val="22282E"/>
                 </a:solidFill>
               </a:rPr>
-              <a:t>•  En una VM comprometida por ti, ejecuta las tres fases: contén preservando evidencia, erradica toda la persistencia (demuestra que la enumeraste completa) y valida la erradicación con criterios explícitos.</a:t>
-            </a:r>
-          </a:p>
-          <a:p>
-            <a:pPr>
-              <a:spcAft>
-                <a:spcPts val="600"/>
-              </a:spcAft>
-            </a:pPr>
-            <a:r>
-              <a:rPr sz="1500">
-                <a:solidFill>
-                  <a:srgbClr val="22282E"/>
-                </a:solidFill>
-              </a:rPr>
-              <a:t>•  Criterio de aceptación: documentas (a) cómo aislaste sin perder evidencia, (b) la lista completa de mecanismos de persistencia hallados y eliminados, (c) la rotación de credenciales, y (d) los criterios cumplidos que te permiten declarar erradicado el incidente.</a:t>
+              <a:t>•  Dominas la clase cuando comparas opciones de contención por riesgo, reversión e impacto; amplías erradicación a activos, identidad y nube; validas una reconstrucción más allá del sistema operativo; y…</a:t>
             </a:r>
           </a:p>
         </p:txBody>
